--- a/DMG_B1.pptx
+++ b/DMG_B1.pptx
@@ -14,6 +14,9 @@
     <p:sldId id="261" r:id="rId8"/>
     <p:sldId id="262" r:id="rId9"/>
     <p:sldId id="263" r:id="rId10"/>
+    <p:sldId id="265" r:id="rId11"/>
+    <p:sldId id="267" r:id="rId12"/>
+    <p:sldId id="266" r:id="rId13"/>
   </p:sldIdLst>
   <p:sldSz cx="12192000" cy="6858000"/>
   <p:notesSz cx="6858000" cy="9144000"/>
@@ -112,7 +115,20 @@
       </a:defRPr>
     </a:lvl9pPr>
   </p:defaultTextStyle>
+  <p:extLst>
+    <p:ext uri="{EFAFB233-063F-42B5-8137-9DF3F51BA10A}">
+      <p15:sldGuideLst xmlns:p15="http://schemas.microsoft.com/office/powerpoint/2012/main"/>
+    </p:ext>
+  </p:extLst>
 </p:presentation>
+</file>
+
+<file path=ppt/revisionInfo.xml><?xml version="1.0" encoding="utf-8"?>
+<p1510:revInfo xmlns:a="http://schemas.openxmlformats.org/drawingml/2006/main" xmlns:r="http://schemas.openxmlformats.org/officeDocument/2006/relationships" xmlns:p1510="http://schemas.microsoft.com/office/powerpoint/2015/10/main">
+  <p1510:revLst>
+    <p1510:client id="{6A327423-E4D8-4E16-A8FF-9036B760B5A8}" v="730" dt="2026-05-06T16:45:02.348"/>
+  </p1510:revLst>
+</p1510:revInfo>
 </file>
 
 <file path=ppt/slideLayouts/slideLayout1.xml><?xml version="1.0" encoding="utf-8"?>
@@ -3428,7 +3444,7 @@
           </a:prstGeom>
         </p:spPr>
         <p:txBody>
-          <a:bodyPr vert="horz" lIns="91440" tIns="45720" rIns="91440" bIns="45720" rtlCol="0">
+          <a:bodyPr vert="horz" lIns="91440" tIns="45720" rIns="91440" bIns="45720" rtlCol="0" anchor="t">
             <a:normAutofit/>
           </a:bodyPr>
           <a:lstStyle>
@@ -3613,8 +3629,8 @@
           </a:p>
           <a:p>
             <a:r>
-              <a:rPr lang="de-DE" sz="1600" dirty="0"/>
-              <a:t>Jacob</a:t>
+              <a:rPr lang="de-DE" sz="1600"/>
+              <a:t>Jacob Wolf</a:t>
             </a:r>
           </a:p>
           <a:p>
@@ -3629,6 +3645,989 @@
     <p:extLst>
       <p:ext uri="{BB962C8B-B14F-4D97-AF65-F5344CB8AC3E}">
         <p14:creationId xmlns:p14="http://schemas.microsoft.com/office/powerpoint/2010/main" val="2528502161"/>
+      </p:ext>
+    </p:extLst>
+  </p:cSld>
+  <p:clrMapOvr>
+    <a:masterClrMapping/>
+  </p:clrMapOvr>
+</p:sld>
+</file>
+
+<file path=ppt/slides/slide10.xml><?xml version="1.0" encoding="utf-8"?>
+<p:sld xmlns:a="http://schemas.openxmlformats.org/drawingml/2006/main" xmlns:r="http://schemas.openxmlformats.org/officeDocument/2006/relationships" xmlns:p="http://schemas.openxmlformats.org/presentationml/2006/main">
+  <p:cSld>
+    <p:spTree>
+      <p:nvGrpSpPr>
+        <p:cNvPr id="1" name=""/>
+        <p:cNvGrpSpPr/>
+        <p:nvPr/>
+      </p:nvGrpSpPr>
+      <p:grpSpPr>
+        <a:xfrm>
+          <a:off x="0" y="0"/>
+          <a:ext cx="0" cy="0"/>
+          <a:chOff x="0" y="0"/>
+          <a:chExt cx="0" cy="0"/>
+        </a:xfrm>
+      </p:grpSpPr>
+      <p:sp>
+        <p:nvSpPr>
+          <p:cNvPr id="2" name="Titel 1">
+            <a:extLst>
+              <a:ext uri="{FF2B5EF4-FFF2-40B4-BE49-F238E27FC236}">
+                <a16:creationId xmlns:a16="http://schemas.microsoft.com/office/drawing/2014/main" id="{5FD093D6-EEBA-65FF-F54B-67970B83B3BA}"/>
+              </a:ext>
+            </a:extLst>
+          </p:cNvPr>
+          <p:cNvSpPr>
+            <a:spLocks noGrp="1"/>
+          </p:cNvSpPr>
+          <p:nvPr>
+            <p:ph type="title"/>
+          </p:nvPr>
+        </p:nvSpPr>
+        <p:spPr/>
+        <p:txBody>
+          <a:bodyPr/>
+          <a:lstStyle/>
+          <a:p>
+            <a:r>
+              <a:rPr lang="de-DE"/>
+              <a:t>Polynomiale</a:t>
+            </a:r>
+            <a:r>
+              <a:rPr lang="de-DE" dirty="0"/>
+              <a:t> Regressionsmodelle</a:t>
+            </a:r>
+          </a:p>
+        </p:txBody>
+      </p:sp>
+      <p:pic>
+        <p:nvPicPr>
+          <p:cNvPr id="4" name="Inhaltsplatzhalter 3" descr="Ein Bild, das Text, Diagramm, Screenshot, Reihe enthält.&#10;&#10;KI-generierte Inhalte können fehlerhaft sein.">
+            <a:extLst>
+              <a:ext uri="{FF2B5EF4-FFF2-40B4-BE49-F238E27FC236}">
+                <a16:creationId xmlns:a16="http://schemas.microsoft.com/office/drawing/2014/main" id="{1F608E13-AEC3-CEF5-AFA7-2B3FB9CA67D2}"/>
+              </a:ext>
+            </a:extLst>
+          </p:cNvPr>
+          <p:cNvPicPr>
+            <a:picLocks noGrp="1" noChangeAspect="1"/>
+          </p:cNvPicPr>
+          <p:nvPr>
+            <p:ph idx="1"/>
+          </p:nvPr>
+        </p:nvPicPr>
+        <p:blipFill>
+          <a:blip r:embed="rId2"/>
+          <a:stretch>
+            <a:fillRect/>
+          </a:stretch>
+        </p:blipFill>
+        <p:spPr>
+          <a:xfrm>
+            <a:off x="122663" y="2143033"/>
+            <a:ext cx="11946673" cy="3270473"/>
+          </a:xfrm>
+          <a:prstGeom prst="rect">
+            <a:avLst/>
+          </a:prstGeom>
+        </p:spPr>
+      </p:pic>
+    </p:spTree>
+    <p:extLst>
+      <p:ext uri="{BB962C8B-B14F-4D97-AF65-F5344CB8AC3E}">
+        <p14:creationId xmlns:p14="http://schemas.microsoft.com/office/powerpoint/2010/main" val="2252129840"/>
+      </p:ext>
+    </p:extLst>
+  </p:cSld>
+  <p:clrMapOvr>
+    <a:masterClrMapping/>
+  </p:clrMapOvr>
+</p:sld>
+</file>
+
+<file path=ppt/slides/slide11.xml><?xml version="1.0" encoding="utf-8"?>
+<p:sld xmlns:a="http://schemas.openxmlformats.org/drawingml/2006/main" xmlns:r="http://schemas.openxmlformats.org/officeDocument/2006/relationships" xmlns:p="http://schemas.openxmlformats.org/presentationml/2006/main">
+  <p:cSld>
+    <p:spTree>
+      <p:nvGrpSpPr>
+        <p:cNvPr id="1" name=""/>
+        <p:cNvGrpSpPr/>
+        <p:nvPr/>
+      </p:nvGrpSpPr>
+      <p:grpSpPr>
+        <a:xfrm>
+          <a:off x="0" y="0"/>
+          <a:ext cx="0" cy="0"/>
+          <a:chOff x="0" y="0"/>
+          <a:chExt cx="0" cy="0"/>
+        </a:xfrm>
+      </p:grpSpPr>
+      <p:sp>
+        <p:nvSpPr>
+          <p:cNvPr id="2" name="Titel 1">
+            <a:extLst>
+              <a:ext uri="{FF2B5EF4-FFF2-40B4-BE49-F238E27FC236}">
+                <a16:creationId xmlns:a16="http://schemas.microsoft.com/office/drawing/2014/main" id="{5E460694-95A8-8BA8-B0B0-FBF829923756}"/>
+              </a:ext>
+            </a:extLst>
+          </p:cNvPr>
+          <p:cNvSpPr>
+            <a:spLocks noGrp="1"/>
+          </p:cNvSpPr>
+          <p:nvPr>
+            <p:ph type="title"/>
+          </p:nvPr>
+        </p:nvSpPr>
+        <p:spPr/>
+        <p:txBody>
+          <a:bodyPr/>
+          <a:lstStyle/>
+          <a:p>
+            <a:r>
+              <a:rPr lang="de-DE"/>
+              <a:t>Polynomiale Regressionsmodelle</a:t>
+            </a:r>
+          </a:p>
+        </p:txBody>
+      </p:sp>
+      <p:sp>
+        <p:nvSpPr>
+          <p:cNvPr id="3" name="Inhaltsplatzhalter 2">
+            <a:extLst>
+              <a:ext uri="{FF2B5EF4-FFF2-40B4-BE49-F238E27FC236}">
+                <a16:creationId xmlns:a16="http://schemas.microsoft.com/office/drawing/2014/main" id="{163C7537-7D1D-BCE7-0FC1-F5EF49C83D4F}"/>
+              </a:ext>
+            </a:extLst>
+          </p:cNvPr>
+          <p:cNvSpPr>
+            <a:spLocks noGrp="1"/>
+          </p:cNvSpPr>
+          <p:nvPr>
+            <p:ph idx="1"/>
+          </p:nvPr>
+        </p:nvSpPr>
+        <p:spPr>
+          <a:xfrm>
+            <a:off x="838200" y="1825624"/>
+            <a:ext cx="3499625" cy="4342046"/>
+          </a:xfrm>
+        </p:spPr>
+        <p:txBody>
+          <a:bodyPr vert="horz" lIns="91440" tIns="45720" rIns="91440" bIns="45720" rtlCol="0" anchor="t">
+            <a:normAutofit/>
+          </a:bodyPr>
+          <a:lstStyle/>
+          <a:p>
+            <a:pPr marL="0" indent="0">
+              <a:buNone/>
+            </a:pPr>
+            <a:r>
+              <a:rPr lang="de-DE" sz="2400" b="1" dirty="0">
+                <a:highlight>
+                  <a:srgbClr val="FFFFFF"/>
+                </a:highlight>
+                <a:ea typeface="+mn-lt"/>
+                <a:cs typeface="+mn-lt"/>
+              </a:rPr>
+              <a:t>Polynom 1. Or</a:t>
+            </a:r>
+            <a:r>
+              <a:rPr lang="de-DE" sz="2400" b="1">
+                <a:highlight>
+                  <a:srgbClr val="FFFFFF"/>
+                </a:highlight>
+                <a:ea typeface="+mn-lt"/>
+                <a:cs typeface="+mn-lt"/>
+              </a:rPr>
+              <a:t>dnung:</a:t>
+            </a:r>
+            <a:endParaRPr lang="de-DE" sz="2400" dirty="0">
+              <a:highlight>
+                <a:srgbClr val="FFFFFF"/>
+              </a:highlight>
+              <a:ea typeface="+mn-lt"/>
+              <a:cs typeface="+mn-lt"/>
+            </a:endParaRPr>
+          </a:p>
+          <a:p>
+            <a:r>
+              <a:rPr lang="de-DE" sz="2400">
+                <a:highlight>
+                  <a:srgbClr val="FFFFFF"/>
+                </a:highlight>
+                <a:ea typeface="+mn-lt"/>
+                <a:cs typeface="+mn-lt"/>
+              </a:rPr>
+              <a:t>simple Gerade limitiert den Trend stark</a:t>
+            </a:r>
+            <a:endParaRPr lang="de-DE" sz="2400">
+              <a:ea typeface="+mn-lt"/>
+              <a:cs typeface="+mn-lt"/>
+            </a:endParaRPr>
+          </a:p>
+          <a:p>
+            <a:r>
+              <a:rPr lang="de-DE" sz="2400" dirty="0">
+                <a:highlight>
+                  <a:srgbClr val="FFFFFF"/>
+                </a:highlight>
+                <a:ea typeface="+mn-lt"/>
+                <a:cs typeface="+mn-lt"/>
+              </a:rPr>
+              <a:t>durch fehlende Krümmung geht </a:t>
+            </a:r>
+            <a:r>
+              <a:rPr lang="de-DE" sz="2400">
+                <a:highlight>
+                  <a:srgbClr val="FFFFFF"/>
+                </a:highlight>
+                <a:ea typeface="+mn-lt"/>
+                <a:cs typeface="+mn-lt"/>
+              </a:rPr>
+              <a:t>Varianz verloren</a:t>
+            </a:r>
+            <a:endParaRPr lang="de-DE" sz="2400">
+              <a:ea typeface="+mn-lt"/>
+              <a:cs typeface="+mn-lt"/>
+            </a:endParaRPr>
+          </a:p>
+          <a:p>
+            <a:r>
+              <a:rPr lang="de-DE" sz="2400" dirty="0" err="1">
+                <a:highlight>
+                  <a:srgbClr val="FFFFFF"/>
+                </a:highlight>
+                <a:ea typeface="+mn-lt"/>
+                <a:cs typeface="+mn-lt"/>
+              </a:rPr>
+              <a:t>Underfitting</a:t>
+            </a:r>
+            <a:endParaRPr lang="de-DE" sz="2400" b="1">
+              <a:highlight>
+                <a:srgbClr val="FFFFFF"/>
+              </a:highlight>
+              <a:ea typeface="+mn-lt"/>
+              <a:cs typeface="+mn-lt"/>
+            </a:endParaRPr>
+          </a:p>
+          <a:p>
+            <a:endParaRPr lang="de-DE" b="1" dirty="0">
+              <a:highlight>
+                <a:srgbClr val="FFFFFF"/>
+              </a:highlight>
+            </a:endParaRPr>
+          </a:p>
+          <a:p>
+            <a:endParaRPr lang="de-DE" b="1" dirty="0">
+              <a:highlight>
+                <a:srgbClr val="FFFFFF"/>
+              </a:highlight>
+            </a:endParaRPr>
+          </a:p>
+        </p:txBody>
+      </p:sp>
+      <p:sp>
+        <p:nvSpPr>
+          <p:cNvPr id="6" name="Inhaltsplatzhalter 2">
+            <a:extLst>
+              <a:ext uri="{FF2B5EF4-FFF2-40B4-BE49-F238E27FC236}">
+                <a16:creationId xmlns:a16="http://schemas.microsoft.com/office/drawing/2014/main" id="{FF00C297-F5DF-2705-3EB2-34E20C31EDB4}"/>
+              </a:ext>
+            </a:extLst>
+          </p:cNvPr>
+          <p:cNvSpPr txBox="1">
+            <a:spLocks/>
+          </p:cNvSpPr>
+          <p:nvPr/>
+        </p:nvSpPr>
+        <p:spPr>
+          <a:xfrm>
+            <a:off x="4354552" y="1829342"/>
+            <a:ext cx="3499624" cy="4351338"/>
+          </a:xfrm>
+          <a:prstGeom prst="rect">
+            <a:avLst/>
+          </a:prstGeom>
+        </p:spPr>
+        <p:txBody>
+          <a:bodyPr vert="horz" lIns="91440" tIns="45720" rIns="91440" bIns="45720" rtlCol="0" anchor="t">
+            <a:normAutofit/>
+          </a:bodyPr>
+          <a:lstStyle>
+            <a:lvl1pPr marL="228600" indent="-228600" algn="l" defTabSz="914400" rtl="0" eaLnBrk="1" latinLnBrk="0" hangingPunct="1">
+              <a:lnSpc>
+                <a:spcPct val="90000"/>
+              </a:lnSpc>
+              <a:spcBef>
+                <a:spcPts val="1000"/>
+              </a:spcBef>
+              <a:buFont typeface="Arial" panose="020B0604020202020204" pitchFamily="34" charset="0"/>
+              <a:buChar char="•"/>
+              <a:defRPr sz="2800" kern="1200">
+                <a:solidFill>
+                  <a:schemeClr val="tx1"/>
+                </a:solidFill>
+                <a:latin typeface="+mn-lt"/>
+                <a:ea typeface="+mn-ea"/>
+                <a:cs typeface="+mn-cs"/>
+              </a:defRPr>
+            </a:lvl1pPr>
+            <a:lvl2pPr marL="685800" indent="-228600" algn="l" defTabSz="914400" rtl="0" eaLnBrk="1" latinLnBrk="0" hangingPunct="1">
+              <a:lnSpc>
+                <a:spcPct val="90000"/>
+              </a:lnSpc>
+              <a:spcBef>
+                <a:spcPts val="500"/>
+              </a:spcBef>
+              <a:buFont typeface="Arial" panose="020B0604020202020204" pitchFamily="34" charset="0"/>
+              <a:buChar char="•"/>
+              <a:defRPr sz="2400" kern="1200">
+                <a:solidFill>
+                  <a:schemeClr val="tx1"/>
+                </a:solidFill>
+                <a:latin typeface="+mn-lt"/>
+                <a:ea typeface="+mn-ea"/>
+                <a:cs typeface="+mn-cs"/>
+              </a:defRPr>
+            </a:lvl2pPr>
+            <a:lvl3pPr marL="1143000" indent="-228600" algn="l" defTabSz="914400" rtl="0" eaLnBrk="1" latinLnBrk="0" hangingPunct="1">
+              <a:lnSpc>
+                <a:spcPct val="90000"/>
+              </a:lnSpc>
+              <a:spcBef>
+                <a:spcPts val="500"/>
+              </a:spcBef>
+              <a:buFont typeface="Arial" panose="020B0604020202020204" pitchFamily="34" charset="0"/>
+              <a:buChar char="•"/>
+              <a:defRPr sz="2000" kern="1200">
+                <a:solidFill>
+                  <a:schemeClr val="tx1"/>
+                </a:solidFill>
+                <a:latin typeface="+mn-lt"/>
+                <a:ea typeface="+mn-ea"/>
+                <a:cs typeface="+mn-cs"/>
+              </a:defRPr>
+            </a:lvl3pPr>
+            <a:lvl4pPr marL="1600200" indent="-228600" algn="l" defTabSz="914400" rtl="0" eaLnBrk="1" latinLnBrk="0" hangingPunct="1">
+              <a:lnSpc>
+                <a:spcPct val="90000"/>
+              </a:lnSpc>
+              <a:spcBef>
+                <a:spcPts val="500"/>
+              </a:spcBef>
+              <a:buFont typeface="Arial" panose="020B0604020202020204" pitchFamily="34" charset="0"/>
+              <a:buChar char="•"/>
+              <a:defRPr sz="1800" kern="1200">
+                <a:solidFill>
+                  <a:schemeClr val="tx1"/>
+                </a:solidFill>
+                <a:latin typeface="+mn-lt"/>
+                <a:ea typeface="+mn-ea"/>
+                <a:cs typeface="+mn-cs"/>
+              </a:defRPr>
+            </a:lvl4pPr>
+            <a:lvl5pPr marL="2057400" indent="-228600" algn="l" defTabSz="914400" rtl="0" eaLnBrk="1" latinLnBrk="0" hangingPunct="1">
+              <a:lnSpc>
+                <a:spcPct val="90000"/>
+              </a:lnSpc>
+              <a:spcBef>
+                <a:spcPts val="500"/>
+              </a:spcBef>
+              <a:buFont typeface="Arial" panose="020B0604020202020204" pitchFamily="34" charset="0"/>
+              <a:buChar char="•"/>
+              <a:defRPr sz="1800" kern="1200">
+                <a:solidFill>
+                  <a:schemeClr val="tx1"/>
+                </a:solidFill>
+                <a:latin typeface="+mn-lt"/>
+                <a:ea typeface="+mn-ea"/>
+                <a:cs typeface="+mn-cs"/>
+              </a:defRPr>
+            </a:lvl5pPr>
+            <a:lvl6pPr marL="2514600" indent="-228600" algn="l" defTabSz="914400" rtl="0" eaLnBrk="1" latinLnBrk="0" hangingPunct="1">
+              <a:lnSpc>
+                <a:spcPct val="90000"/>
+              </a:lnSpc>
+              <a:spcBef>
+                <a:spcPts val="500"/>
+              </a:spcBef>
+              <a:buFont typeface="Arial" panose="020B0604020202020204" pitchFamily="34" charset="0"/>
+              <a:buChar char="•"/>
+              <a:defRPr sz="1800" kern="1200">
+                <a:solidFill>
+                  <a:schemeClr val="tx1"/>
+                </a:solidFill>
+                <a:latin typeface="+mn-lt"/>
+                <a:ea typeface="+mn-ea"/>
+                <a:cs typeface="+mn-cs"/>
+              </a:defRPr>
+            </a:lvl6pPr>
+            <a:lvl7pPr marL="2971800" indent="-228600" algn="l" defTabSz="914400" rtl="0" eaLnBrk="1" latinLnBrk="0" hangingPunct="1">
+              <a:lnSpc>
+                <a:spcPct val="90000"/>
+              </a:lnSpc>
+              <a:spcBef>
+                <a:spcPts val="500"/>
+              </a:spcBef>
+              <a:buFont typeface="Arial" panose="020B0604020202020204" pitchFamily="34" charset="0"/>
+              <a:buChar char="•"/>
+              <a:defRPr sz="1800" kern="1200">
+                <a:solidFill>
+                  <a:schemeClr val="tx1"/>
+                </a:solidFill>
+                <a:latin typeface="+mn-lt"/>
+                <a:ea typeface="+mn-ea"/>
+                <a:cs typeface="+mn-cs"/>
+              </a:defRPr>
+            </a:lvl7pPr>
+            <a:lvl8pPr marL="3429000" indent="-228600" algn="l" defTabSz="914400" rtl="0" eaLnBrk="1" latinLnBrk="0" hangingPunct="1">
+              <a:lnSpc>
+                <a:spcPct val="90000"/>
+              </a:lnSpc>
+              <a:spcBef>
+                <a:spcPts val="500"/>
+              </a:spcBef>
+              <a:buFont typeface="Arial" panose="020B0604020202020204" pitchFamily="34" charset="0"/>
+              <a:buChar char="•"/>
+              <a:defRPr sz="1800" kern="1200">
+                <a:solidFill>
+                  <a:schemeClr val="tx1"/>
+                </a:solidFill>
+                <a:latin typeface="+mn-lt"/>
+                <a:ea typeface="+mn-ea"/>
+                <a:cs typeface="+mn-cs"/>
+              </a:defRPr>
+            </a:lvl8pPr>
+            <a:lvl9pPr marL="3886200" indent="-228600" algn="l" defTabSz="914400" rtl="0" eaLnBrk="1" latinLnBrk="0" hangingPunct="1">
+              <a:lnSpc>
+                <a:spcPct val="90000"/>
+              </a:lnSpc>
+              <a:spcBef>
+                <a:spcPts val="500"/>
+              </a:spcBef>
+              <a:buFont typeface="Arial" panose="020B0604020202020204" pitchFamily="34" charset="0"/>
+              <a:buChar char="•"/>
+              <a:defRPr sz="1800" kern="1200">
+                <a:solidFill>
+                  <a:schemeClr val="tx1"/>
+                </a:solidFill>
+                <a:latin typeface="+mn-lt"/>
+                <a:ea typeface="+mn-ea"/>
+                <a:cs typeface="+mn-cs"/>
+              </a:defRPr>
+            </a:lvl9pPr>
+          </a:lstStyle>
+          <a:p>
+            <a:pPr marL="0" indent="0">
+              <a:buFont typeface="Arial" panose="020B0604020202020204" pitchFamily="34" charset="0"/>
+              <a:buNone/>
+            </a:pPr>
+            <a:r>
+              <a:rPr lang="de-DE" sz="2400" b="1">
+                <a:highlight>
+                  <a:srgbClr val="FFFFFF"/>
+                </a:highlight>
+                <a:ea typeface="+mn-lt"/>
+                <a:cs typeface="+mn-lt"/>
+              </a:rPr>
+              <a:t>Polynom 2. Or</a:t>
+            </a:r>
+            <a:r>
+              <a:rPr lang="de-DE" sz="2400" b="1" dirty="0">
+                <a:highlight>
+                  <a:srgbClr val="FFFFFF"/>
+                </a:highlight>
+                <a:ea typeface="+mn-lt"/>
+                <a:cs typeface="+mn-lt"/>
+              </a:rPr>
+              <a:t>dnung:</a:t>
+            </a:r>
+            <a:endParaRPr lang="de-DE" sz="2400" dirty="0">
+              <a:highlight>
+                <a:srgbClr val="FFFFFF"/>
+              </a:highlight>
+              <a:ea typeface="+mn-lt"/>
+              <a:cs typeface="+mn-lt"/>
+            </a:endParaRPr>
+          </a:p>
+          <a:p>
+            <a:r>
+              <a:rPr lang="de-DE" sz="2400">
+                <a:highlight>
+                  <a:srgbClr val="FFFFFF"/>
+                </a:highlight>
+                <a:ea typeface="+mn-lt"/>
+                <a:cs typeface="+mn-lt"/>
+              </a:rPr>
+              <a:t>Bessere Glättung der Werte</a:t>
+            </a:r>
+            <a:endParaRPr lang="de-DE" sz="2400">
+              <a:ea typeface="+mn-lt"/>
+              <a:cs typeface="+mn-lt"/>
+            </a:endParaRPr>
+          </a:p>
+          <a:p>
+            <a:r>
+              <a:rPr lang="de-DE" sz="2400" dirty="0">
+                <a:highlight>
+                  <a:srgbClr val="FFFFFF"/>
+                </a:highlight>
+              </a:rPr>
+              <a:t>Optimaler </a:t>
+            </a:r>
+            <a:r>
+              <a:rPr lang="de-DE" sz="2400">
+                <a:highlight>
+                  <a:srgbClr val="FFFFFF"/>
+                </a:highlight>
+              </a:rPr>
+              <a:t>Kompromiss zwischen Bias und Varianz</a:t>
+            </a:r>
+            <a:endParaRPr lang="de-DE" sz="2400" dirty="0">
+              <a:highlight>
+                <a:srgbClr val="FFFFFF"/>
+              </a:highlight>
+            </a:endParaRPr>
+          </a:p>
+        </p:txBody>
+      </p:sp>
+      <p:sp>
+        <p:nvSpPr>
+          <p:cNvPr id="8" name="Inhaltsplatzhalter 2">
+            <a:extLst>
+              <a:ext uri="{FF2B5EF4-FFF2-40B4-BE49-F238E27FC236}">
+                <a16:creationId xmlns:a16="http://schemas.microsoft.com/office/drawing/2014/main" id="{F8373812-FE0D-347E-B3AB-F2453BBE84C4}"/>
+              </a:ext>
+            </a:extLst>
+          </p:cNvPr>
+          <p:cNvSpPr txBox="1">
+            <a:spLocks/>
+          </p:cNvSpPr>
+          <p:nvPr/>
+        </p:nvSpPr>
+        <p:spPr>
+          <a:xfrm>
+            <a:off x="7820722" y="1829342"/>
+            <a:ext cx="3546088" cy="4351338"/>
+          </a:xfrm>
+          <a:prstGeom prst="rect">
+            <a:avLst/>
+          </a:prstGeom>
+        </p:spPr>
+        <p:txBody>
+          <a:bodyPr vert="horz" lIns="91440" tIns="45720" rIns="91440" bIns="45720" rtlCol="0" anchor="t">
+            <a:normAutofit/>
+          </a:bodyPr>
+          <a:lstStyle>
+            <a:lvl1pPr marL="228600" indent="-228600" algn="l" defTabSz="914400" rtl="0" eaLnBrk="1" latinLnBrk="0" hangingPunct="1">
+              <a:lnSpc>
+                <a:spcPct val="90000"/>
+              </a:lnSpc>
+              <a:spcBef>
+                <a:spcPts val="1000"/>
+              </a:spcBef>
+              <a:buFont typeface="Arial" panose="020B0604020202020204" pitchFamily="34" charset="0"/>
+              <a:buChar char="•"/>
+              <a:defRPr sz="2800" kern="1200">
+                <a:solidFill>
+                  <a:schemeClr val="tx1"/>
+                </a:solidFill>
+                <a:latin typeface="+mn-lt"/>
+                <a:ea typeface="+mn-ea"/>
+                <a:cs typeface="+mn-cs"/>
+              </a:defRPr>
+            </a:lvl1pPr>
+            <a:lvl2pPr marL="685800" indent="-228600" algn="l" defTabSz="914400" rtl="0" eaLnBrk="1" latinLnBrk="0" hangingPunct="1">
+              <a:lnSpc>
+                <a:spcPct val="90000"/>
+              </a:lnSpc>
+              <a:spcBef>
+                <a:spcPts val="500"/>
+              </a:spcBef>
+              <a:buFont typeface="Arial" panose="020B0604020202020204" pitchFamily="34" charset="0"/>
+              <a:buChar char="•"/>
+              <a:defRPr sz="2400" kern="1200">
+                <a:solidFill>
+                  <a:schemeClr val="tx1"/>
+                </a:solidFill>
+                <a:latin typeface="+mn-lt"/>
+                <a:ea typeface="+mn-ea"/>
+                <a:cs typeface="+mn-cs"/>
+              </a:defRPr>
+            </a:lvl2pPr>
+            <a:lvl3pPr marL="1143000" indent="-228600" algn="l" defTabSz="914400" rtl="0" eaLnBrk="1" latinLnBrk="0" hangingPunct="1">
+              <a:lnSpc>
+                <a:spcPct val="90000"/>
+              </a:lnSpc>
+              <a:spcBef>
+                <a:spcPts val="500"/>
+              </a:spcBef>
+              <a:buFont typeface="Arial" panose="020B0604020202020204" pitchFamily="34" charset="0"/>
+              <a:buChar char="•"/>
+              <a:defRPr sz="2000" kern="1200">
+                <a:solidFill>
+                  <a:schemeClr val="tx1"/>
+                </a:solidFill>
+                <a:latin typeface="+mn-lt"/>
+                <a:ea typeface="+mn-ea"/>
+                <a:cs typeface="+mn-cs"/>
+              </a:defRPr>
+            </a:lvl3pPr>
+            <a:lvl4pPr marL="1600200" indent="-228600" algn="l" defTabSz="914400" rtl="0" eaLnBrk="1" latinLnBrk="0" hangingPunct="1">
+              <a:lnSpc>
+                <a:spcPct val="90000"/>
+              </a:lnSpc>
+              <a:spcBef>
+                <a:spcPts val="500"/>
+              </a:spcBef>
+              <a:buFont typeface="Arial" panose="020B0604020202020204" pitchFamily="34" charset="0"/>
+              <a:buChar char="•"/>
+              <a:defRPr sz="1800" kern="1200">
+                <a:solidFill>
+                  <a:schemeClr val="tx1"/>
+                </a:solidFill>
+                <a:latin typeface="+mn-lt"/>
+                <a:ea typeface="+mn-ea"/>
+                <a:cs typeface="+mn-cs"/>
+              </a:defRPr>
+            </a:lvl4pPr>
+            <a:lvl5pPr marL="2057400" indent="-228600" algn="l" defTabSz="914400" rtl="0" eaLnBrk="1" latinLnBrk="0" hangingPunct="1">
+              <a:lnSpc>
+                <a:spcPct val="90000"/>
+              </a:lnSpc>
+              <a:spcBef>
+                <a:spcPts val="500"/>
+              </a:spcBef>
+              <a:buFont typeface="Arial" panose="020B0604020202020204" pitchFamily="34" charset="0"/>
+              <a:buChar char="•"/>
+              <a:defRPr sz="1800" kern="1200">
+                <a:solidFill>
+                  <a:schemeClr val="tx1"/>
+                </a:solidFill>
+                <a:latin typeface="+mn-lt"/>
+                <a:ea typeface="+mn-ea"/>
+                <a:cs typeface="+mn-cs"/>
+              </a:defRPr>
+            </a:lvl5pPr>
+            <a:lvl6pPr marL="2514600" indent="-228600" algn="l" defTabSz="914400" rtl="0" eaLnBrk="1" latinLnBrk="0" hangingPunct="1">
+              <a:lnSpc>
+                <a:spcPct val="90000"/>
+              </a:lnSpc>
+              <a:spcBef>
+                <a:spcPts val="500"/>
+              </a:spcBef>
+              <a:buFont typeface="Arial" panose="020B0604020202020204" pitchFamily="34" charset="0"/>
+              <a:buChar char="•"/>
+              <a:defRPr sz="1800" kern="1200">
+                <a:solidFill>
+                  <a:schemeClr val="tx1"/>
+                </a:solidFill>
+                <a:latin typeface="+mn-lt"/>
+                <a:ea typeface="+mn-ea"/>
+                <a:cs typeface="+mn-cs"/>
+              </a:defRPr>
+            </a:lvl6pPr>
+            <a:lvl7pPr marL="2971800" indent="-228600" algn="l" defTabSz="914400" rtl="0" eaLnBrk="1" latinLnBrk="0" hangingPunct="1">
+              <a:lnSpc>
+                <a:spcPct val="90000"/>
+              </a:lnSpc>
+              <a:spcBef>
+                <a:spcPts val="500"/>
+              </a:spcBef>
+              <a:buFont typeface="Arial" panose="020B0604020202020204" pitchFamily="34" charset="0"/>
+              <a:buChar char="•"/>
+              <a:defRPr sz="1800" kern="1200">
+                <a:solidFill>
+                  <a:schemeClr val="tx1"/>
+                </a:solidFill>
+                <a:latin typeface="+mn-lt"/>
+                <a:ea typeface="+mn-ea"/>
+                <a:cs typeface="+mn-cs"/>
+              </a:defRPr>
+            </a:lvl7pPr>
+            <a:lvl8pPr marL="3429000" indent="-228600" algn="l" defTabSz="914400" rtl="0" eaLnBrk="1" latinLnBrk="0" hangingPunct="1">
+              <a:lnSpc>
+                <a:spcPct val="90000"/>
+              </a:lnSpc>
+              <a:spcBef>
+                <a:spcPts val="500"/>
+              </a:spcBef>
+              <a:buFont typeface="Arial" panose="020B0604020202020204" pitchFamily="34" charset="0"/>
+              <a:buChar char="•"/>
+              <a:defRPr sz="1800" kern="1200">
+                <a:solidFill>
+                  <a:schemeClr val="tx1"/>
+                </a:solidFill>
+                <a:latin typeface="+mn-lt"/>
+                <a:ea typeface="+mn-ea"/>
+                <a:cs typeface="+mn-cs"/>
+              </a:defRPr>
+            </a:lvl8pPr>
+            <a:lvl9pPr marL="3886200" indent="-228600" algn="l" defTabSz="914400" rtl="0" eaLnBrk="1" latinLnBrk="0" hangingPunct="1">
+              <a:lnSpc>
+                <a:spcPct val="90000"/>
+              </a:lnSpc>
+              <a:spcBef>
+                <a:spcPts val="500"/>
+              </a:spcBef>
+              <a:buFont typeface="Arial" panose="020B0604020202020204" pitchFamily="34" charset="0"/>
+              <a:buChar char="•"/>
+              <a:defRPr sz="1800" kern="1200">
+                <a:solidFill>
+                  <a:schemeClr val="tx1"/>
+                </a:solidFill>
+                <a:latin typeface="+mn-lt"/>
+                <a:ea typeface="+mn-ea"/>
+                <a:cs typeface="+mn-cs"/>
+              </a:defRPr>
+            </a:lvl9pPr>
+          </a:lstStyle>
+          <a:p>
+            <a:pPr marL="0" indent="0">
+              <a:buFont typeface="Arial" panose="020B0604020202020204" pitchFamily="34" charset="0"/>
+              <a:buNone/>
+            </a:pPr>
+            <a:r>
+              <a:rPr lang="de-DE" sz="2400" b="1">
+                <a:highlight>
+                  <a:srgbClr val="FFFFFF"/>
+                </a:highlight>
+                <a:ea typeface="+mn-lt"/>
+                <a:cs typeface="+mn-lt"/>
+              </a:rPr>
+              <a:t>Polynom 3. Or</a:t>
+            </a:r>
+            <a:r>
+              <a:rPr lang="de-DE" sz="2400" b="1" dirty="0">
+                <a:highlight>
+                  <a:srgbClr val="FFFFFF"/>
+                </a:highlight>
+                <a:ea typeface="+mn-lt"/>
+                <a:cs typeface="+mn-lt"/>
+              </a:rPr>
+              <a:t>dnung:</a:t>
+            </a:r>
+            <a:endParaRPr lang="de-DE" sz="2400" dirty="0">
+              <a:highlight>
+                <a:srgbClr val="FFFFFF"/>
+              </a:highlight>
+              <a:ea typeface="+mn-lt"/>
+              <a:cs typeface="+mn-lt"/>
+            </a:endParaRPr>
+          </a:p>
+          <a:p>
+            <a:r>
+              <a:rPr lang="de-DE" sz="2400" dirty="0">
+                <a:highlight>
+                  <a:srgbClr val="FFFFFF"/>
+                </a:highlight>
+              </a:rPr>
+              <a:t>Unnötig </a:t>
+            </a:r>
+            <a:r>
+              <a:rPr lang="de-DE" sz="2400">
+                <a:highlight>
+                  <a:srgbClr val="FFFFFF"/>
+                </a:highlight>
+              </a:rPr>
+              <a:t>Komplex, da kein Mehrwehrt im Vergleich zu 2. Grad erkennbar ist</a:t>
+            </a:r>
+            <a:endParaRPr lang="de-DE" sz="2400" dirty="0">
+              <a:highlight>
+                <a:srgbClr val="FFFFFF"/>
+              </a:highlight>
+            </a:endParaRPr>
+          </a:p>
+          <a:p>
+            <a:endParaRPr lang="de-DE" sz="2400" b="1" dirty="0">
+              <a:highlight>
+                <a:srgbClr val="FFFFFF"/>
+              </a:highlight>
+            </a:endParaRPr>
+          </a:p>
+        </p:txBody>
+      </p:sp>
+    </p:spTree>
+    <p:extLst>
+      <p:ext uri="{BB962C8B-B14F-4D97-AF65-F5344CB8AC3E}">
+        <p14:creationId xmlns:p14="http://schemas.microsoft.com/office/powerpoint/2010/main" val="3105767841"/>
+      </p:ext>
+    </p:extLst>
+  </p:cSld>
+  <p:clrMapOvr>
+    <a:masterClrMapping/>
+  </p:clrMapOvr>
+</p:sld>
+</file>
+
+<file path=ppt/slides/slide12.xml><?xml version="1.0" encoding="utf-8"?>
+<p:sld xmlns:a="http://schemas.openxmlformats.org/drawingml/2006/main" xmlns:r="http://schemas.openxmlformats.org/officeDocument/2006/relationships" xmlns:p="http://schemas.openxmlformats.org/presentationml/2006/main">
+  <p:cSld>
+    <p:spTree>
+      <p:nvGrpSpPr>
+        <p:cNvPr id="1" name=""/>
+        <p:cNvGrpSpPr/>
+        <p:nvPr/>
+      </p:nvGrpSpPr>
+      <p:grpSpPr>
+        <a:xfrm>
+          <a:off x="0" y="0"/>
+          <a:ext cx="0" cy="0"/>
+          <a:chOff x="0" y="0"/>
+          <a:chExt cx="0" cy="0"/>
+        </a:xfrm>
+      </p:grpSpPr>
+      <p:sp>
+        <p:nvSpPr>
+          <p:cNvPr id="2" name="Titel 1">
+            <a:extLst>
+              <a:ext uri="{FF2B5EF4-FFF2-40B4-BE49-F238E27FC236}">
+                <a16:creationId xmlns:a16="http://schemas.microsoft.com/office/drawing/2014/main" id="{0A9A1554-9CC6-3656-B847-7C0DAAD446C1}"/>
+              </a:ext>
+            </a:extLst>
+          </p:cNvPr>
+          <p:cNvSpPr>
+            <a:spLocks noGrp="1"/>
+          </p:cNvSpPr>
+          <p:nvPr>
+            <p:ph type="title"/>
+          </p:nvPr>
+        </p:nvSpPr>
+        <p:spPr>
+          <a:xfrm>
+            <a:off x="838200" y="365125"/>
+            <a:ext cx="5776332" cy="1502123"/>
+          </a:xfrm>
+        </p:spPr>
+        <p:txBody>
+          <a:bodyPr/>
+          <a:lstStyle/>
+          <a:p>
+            <a:r>
+              <a:rPr lang="de-DE"/>
+              <a:t>Klassifikationsproblem – Logische Regression</a:t>
+            </a:r>
+          </a:p>
+        </p:txBody>
+      </p:sp>
+      <p:pic>
+        <p:nvPicPr>
+          <p:cNvPr id="4" name="Inhaltsplatzhalter 3" descr="Ein Bild, das Text, Screenshot, Diagramm, Farbigkeit enthält.&#10;&#10;KI-generierte Inhalte können fehlerhaft sein.">
+            <a:extLst>
+              <a:ext uri="{FF2B5EF4-FFF2-40B4-BE49-F238E27FC236}">
+                <a16:creationId xmlns:a16="http://schemas.microsoft.com/office/drawing/2014/main" id="{BEC0B363-D194-34BA-DBA8-00E12DDD45C7}"/>
+              </a:ext>
+            </a:extLst>
+          </p:cNvPr>
+          <p:cNvPicPr>
+            <a:picLocks noGrp="1" noChangeAspect="1"/>
+          </p:cNvPicPr>
+          <p:nvPr>
+            <p:ph idx="1"/>
+          </p:nvPr>
+        </p:nvPicPr>
+        <p:blipFill>
+          <a:blip r:embed="rId2"/>
+          <a:stretch>
+            <a:fillRect/>
+          </a:stretch>
+        </p:blipFill>
+        <p:spPr>
+          <a:xfrm>
+            <a:off x="6091819" y="1274820"/>
+            <a:ext cx="5788412" cy="4848923"/>
+          </a:xfrm>
+          <a:prstGeom prst="rect">
+            <a:avLst/>
+          </a:prstGeom>
+        </p:spPr>
+      </p:pic>
+      <p:sp>
+        <p:nvSpPr>
+          <p:cNvPr id="7" name="Textfeld 6">
+            <a:extLst>
+              <a:ext uri="{FF2B5EF4-FFF2-40B4-BE49-F238E27FC236}">
+                <a16:creationId xmlns:a16="http://schemas.microsoft.com/office/drawing/2014/main" id="{8E7254B3-CA87-FE1C-8CAE-5068F697F1EB}"/>
+              </a:ext>
+            </a:extLst>
+          </p:cNvPr>
+          <p:cNvSpPr txBox="1"/>
+          <p:nvPr/>
+        </p:nvSpPr>
+        <p:spPr>
+          <a:xfrm>
+            <a:off x="574856" y="3431838"/>
+            <a:ext cx="6311587" cy="1569660"/>
+          </a:xfrm>
+          <a:prstGeom prst="rect">
+            <a:avLst/>
+          </a:prstGeom>
+          <a:noFill/>
+        </p:spPr>
+        <p:txBody>
+          <a:bodyPr rot="0" spcFirstLastPara="0" vertOverflow="overflow" horzOverflow="overflow" vert="horz" wrap="square" lIns="91440" tIns="45720" rIns="91440" bIns="45720" numCol="1" spcCol="0" rtlCol="0" fromWordArt="0" anchor="t" anchorCtr="0" forceAA="0" compatLnSpc="1">
+            <a:prstTxWarp prst="textNoShape">
+              <a:avLst/>
+            </a:prstTxWarp>
+            <a:spAutoFit/>
+          </a:bodyPr>
+          <a:lstStyle/>
+          <a:p>
+            <a:r>
+              <a:rPr lang="de-DE" sz="2400" b="1" dirty="0"/>
+              <a:t>Klassifika</a:t>
+            </a:r>
+            <a:r>
+              <a:rPr lang="de-DE" sz="2400" b="1" dirty="0">
+                <a:solidFill>
+                  <a:srgbClr val="000000"/>
+                </a:solidFill>
+                <a:latin typeface="Aptos"/>
+              </a:rPr>
+              <a:t>tionswerte:</a:t>
+            </a:r>
+            <a:br>
+              <a:rPr lang="de-DE" sz="2400" b="1" dirty="0">
+                <a:latin typeface="Aptos"/>
+              </a:rPr>
+            </a:br>
+            <a:r>
+              <a:rPr lang="de-DE" sz="2400" dirty="0"/>
+              <a:t>x &lt;= 20 :   wenig </a:t>
+            </a:r>
+            <a:r>
+              <a:rPr lang="de-DE" sz="2400" dirty="0" err="1"/>
+              <a:t>bis kein Verkehr</a:t>
+            </a:r>
+            <a:r>
+              <a:rPr lang="de-DE" sz="2400" dirty="0"/>
+              <a:t>, 0</a:t>
+            </a:r>
+            <a:br>
+              <a:rPr lang="de-DE" sz="2400" dirty="0"/>
+            </a:br>
+            <a:r>
+              <a:rPr lang="de-DE" sz="2400" dirty="0"/>
+              <a:t>20 &lt; x &lt;= 100 :  mittelmäßig viel Verkehr, 1</a:t>
+            </a:r>
+            <a:br>
+              <a:rPr lang="de-DE" sz="2400" dirty="0"/>
+            </a:br>
+            <a:r>
+              <a:rPr lang="de-DE" sz="2400" dirty="0"/>
+              <a:t>x &gt; 100 :   viel bis sehr viel Verkehr, 2</a:t>
+            </a:r>
+            <a:endParaRPr lang="de-DE" sz="2400" dirty="0" err="1"/>
+          </a:p>
+        </p:txBody>
+      </p:sp>
+    </p:spTree>
+    <p:extLst>
+      <p:ext uri="{BB962C8B-B14F-4D97-AF65-F5344CB8AC3E}">
+        <p14:creationId xmlns:p14="http://schemas.microsoft.com/office/powerpoint/2010/main" val="3727441607"/>
       </p:ext>
     </p:extLst>
   </p:cSld>
@@ -3839,7 +4838,9 @@
           </a:xfrm>
         </p:spPr>
         <p:txBody>
-          <a:bodyPr/>
+          <a:bodyPr vert="horz" lIns="91440" tIns="45720" rIns="91440" bIns="45720" rtlCol="0" anchor="t">
+            <a:normAutofit/>
+          </a:bodyPr>
           <a:lstStyle/>
           <a:p>
             <a:pPr marL="0" indent="0">
@@ -3847,26 +4848,25 @@
             </a:pPr>
             <a:r>
               <a:rPr lang="de-DE" dirty="0"/>
-              <a:t>Cross 2 und Cross 3 sind sich am ähnlichsten </a:t>
-            </a:r>
-          </a:p>
-          <a:p>
-            <a:pPr marL="0" indent="0">
-              <a:buNone/>
-            </a:pPr>
+              <a:t>Große Unterschiede bei den Mittelwerten </a:t>
+            </a:r>
+            <a:r>
+              <a:rPr lang="de-DE"/>
+              <a:t>erkennbar, deutliche </a:t>
+            </a:r>
             <a:r>
               <a:rPr lang="de-DE" dirty="0"/>
-              <a:t>(Mittelwert-Differenz nur 4,4)</a:t>
+              <a:t>Unterschiede in der Verkehrslage.</a:t>
             </a:r>
           </a:p>
         </p:txBody>
       </p:sp>
       <p:pic>
         <p:nvPicPr>
-          <p:cNvPr id="5" name="Grafik 4">
-            <a:extLst>
-              <a:ext uri="{FF2B5EF4-FFF2-40B4-BE49-F238E27FC236}">
-                <a16:creationId xmlns:a16="http://schemas.microsoft.com/office/drawing/2014/main" id="{73E70F58-8BB0-9717-060F-77C75424DBBD}"/>
+          <p:cNvPr id="7" name="Grafik 6">
+            <a:extLst>
+              <a:ext uri="{FF2B5EF4-FFF2-40B4-BE49-F238E27FC236}">
+                <a16:creationId xmlns:a16="http://schemas.microsoft.com/office/drawing/2014/main" id="{F09EACAA-182B-B534-4893-42A3C47EE222}"/>
               </a:ext>
             </a:extLst>
           </p:cNvPr>
@@ -3883,8 +4883,8 @@
         </p:blipFill>
         <p:spPr>
           <a:xfrm>
-            <a:off x="6195660" y="1476900"/>
-            <a:ext cx="5996340" cy="4411193"/>
+            <a:off x="190500" y="4001294"/>
+            <a:ext cx="5905500" cy="1323975"/>
           </a:xfrm>
           <a:prstGeom prst="rect">
             <a:avLst/>
@@ -3893,10 +4893,10 @@
       </p:pic>
       <p:pic>
         <p:nvPicPr>
-          <p:cNvPr id="7" name="Grafik 6">
-            <a:extLst>
-              <a:ext uri="{FF2B5EF4-FFF2-40B4-BE49-F238E27FC236}">
-                <a16:creationId xmlns:a16="http://schemas.microsoft.com/office/drawing/2014/main" id="{F09EACAA-182B-B534-4893-42A3C47EE222}"/>
+          <p:cNvPr id="4" name="Grafik 3" descr="Ein Bild, das Text, Screenshot, Diagramm, Schrift enthält.&#10;&#10;KI-generierte Inhalte können fehlerhaft sein.">
+            <a:extLst>
+              <a:ext uri="{FF2B5EF4-FFF2-40B4-BE49-F238E27FC236}">
+                <a16:creationId xmlns:a16="http://schemas.microsoft.com/office/drawing/2014/main" id="{76776FD0-A79A-88E7-D99E-EA119F4F562B}"/>
               </a:ext>
             </a:extLst>
           </p:cNvPr>
@@ -3913,8 +4913,8 @@
         </p:blipFill>
         <p:spPr>
           <a:xfrm>
-            <a:off x="190500" y="4001294"/>
-            <a:ext cx="5905500" cy="1323975"/>
+            <a:off x="6099369" y="1522838"/>
+            <a:ext cx="5438775" cy="4667250"/>
           </a:xfrm>
           <a:prstGeom prst="rect">
             <a:avLst/>
@@ -4081,10 +5081,10 @@
       </p:sp>
       <p:pic>
         <p:nvPicPr>
-          <p:cNvPr id="11" name="Grafik 10">
-            <a:extLst>
-              <a:ext uri="{FF2B5EF4-FFF2-40B4-BE49-F238E27FC236}">
-                <a16:creationId xmlns:a16="http://schemas.microsoft.com/office/drawing/2014/main" id="{0665C9AF-9C51-AABC-48A7-D826937BCA5F}"/>
+          <p:cNvPr id="3" name="Grafik 2" descr="Ein Bild, das Text, Screenshot, Diagramm, Schrift enthält.&#10;&#10;KI-generierte Inhalte können fehlerhaft sein.">
+            <a:extLst>
+              <a:ext uri="{FF2B5EF4-FFF2-40B4-BE49-F238E27FC236}">
+                <a16:creationId xmlns:a16="http://schemas.microsoft.com/office/drawing/2014/main" id="{3627CEFB-4846-BE43-F1FD-4DE5EA38BF62}"/>
               </a:ext>
             </a:extLst>
           </p:cNvPr>
@@ -4101,8 +5101,8 @@
         </p:blipFill>
         <p:spPr>
           <a:xfrm>
-            <a:off x="4187498" y="1529233"/>
-            <a:ext cx="3971226" cy="3211579"/>
+            <a:off x="8343707" y="1585049"/>
+            <a:ext cx="3654426" cy="3185584"/>
           </a:xfrm>
           <a:prstGeom prst="rect">
             <a:avLst/>
@@ -4111,10 +5111,10 @@
       </p:pic>
       <p:pic>
         <p:nvPicPr>
-          <p:cNvPr id="13" name="Grafik 12">
-            <a:extLst>
-              <a:ext uri="{FF2B5EF4-FFF2-40B4-BE49-F238E27FC236}">
-                <a16:creationId xmlns:a16="http://schemas.microsoft.com/office/drawing/2014/main" id="{071FE6DB-188A-68D6-84EF-8E54B6041DB4}"/>
+          <p:cNvPr id="4" name="Grafik 3" descr="Ein Bild, das Text, Screenshot, Diagramm, Schrift enthält.&#10;&#10;KI-generierte Inhalte können fehlerhaft sein.">
+            <a:extLst>
+              <a:ext uri="{FF2B5EF4-FFF2-40B4-BE49-F238E27FC236}">
+                <a16:creationId xmlns:a16="http://schemas.microsoft.com/office/drawing/2014/main" id="{C06558E6-A06E-E075-4752-9C8EDF910919}"/>
               </a:ext>
             </a:extLst>
           </p:cNvPr>
@@ -4131,61 +5131,20 @@
         </p:blipFill>
         <p:spPr>
           <a:xfrm>
-            <a:off x="1" y="1352550"/>
-            <a:ext cx="4048818" cy="3388262"/>
+            <a:off x="4272569" y="1585048"/>
+            <a:ext cx="3657601" cy="3090334"/>
           </a:xfrm>
           <a:prstGeom prst="rect">
             <a:avLst/>
           </a:prstGeom>
         </p:spPr>
       </p:pic>
-      <p:sp>
-        <p:nvSpPr>
-          <p:cNvPr id="19" name="Inhaltsplatzhalter 18">
-            <a:extLst>
-              <a:ext uri="{FF2B5EF4-FFF2-40B4-BE49-F238E27FC236}">
-                <a16:creationId xmlns:a16="http://schemas.microsoft.com/office/drawing/2014/main" id="{E603B1B1-3563-1CFB-85BC-F74F15298B56}"/>
-              </a:ext>
-            </a:extLst>
-          </p:cNvPr>
-          <p:cNvSpPr>
-            <a:spLocks noGrp="1"/>
-          </p:cNvSpPr>
-          <p:nvPr>
-            <p:ph idx="1"/>
-          </p:nvPr>
-        </p:nvSpPr>
-        <p:spPr>
-          <a:xfrm>
-            <a:off x="576775" y="4951827"/>
-            <a:ext cx="10777025" cy="1699907"/>
-          </a:xfrm>
-        </p:spPr>
-        <p:txBody>
-          <a:bodyPr/>
-          <a:lstStyle/>
-          <a:p>
-            <a:r>
-              <a:rPr lang="de-DE" dirty="0"/>
-              <a:t>Evtl. </a:t>
-            </a:r>
-            <a:r>
-              <a:rPr lang="de-DE" dirty="0" err="1"/>
-              <a:t>Barplot</a:t>
-            </a:r>
-            <a:r>
-              <a:rPr lang="de-DE" dirty="0"/>
-              <a:t> als Bild?</a:t>
-            </a:r>
-          </a:p>
-        </p:txBody>
-      </p:sp>
       <p:pic>
         <p:nvPicPr>
-          <p:cNvPr id="21" name="Grafik 20">
-            <a:extLst>
-              <a:ext uri="{FF2B5EF4-FFF2-40B4-BE49-F238E27FC236}">
-                <a16:creationId xmlns:a16="http://schemas.microsoft.com/office/drawing/2014/main" id="{FE39425D-0018-C432-C2B4-039A5A919308}"/>
+          <p:cNvPr id="5" name="Grafik 4" descr="Ein Bild, das Text, Screenshot, Diagramm, Schrift enthält.&#10;&#10;KI-generierte Inhalte können fehlerhaft sein.">
+            <a:extLst>
+              <a:ext uri="{FF2B5EF4-FFF2-40B4-BE49-F238E27FC236}">
+                <a16:creationId xmlns:a16="http://schemas.microsoft.com/office/drawing/2014/main" id="{581D6EC6-BC7E-A8AD-8F16-D65D1EB3FE39}"/>
               </a:ext>
             </a:extLst>
           </p:cNvPr>
@@ -4202,8 +5161,8 @@
         </p:blipFill>
         <p:spPr>
           <a:xfrm>
-            <a:off x="8300224" y="1529233"/>
-            <a:ext cx="3699976" cy="3211579"/>
+            <a:off x="193094" y="1553298"/>
+            <a:ext cx="3656537" cy="3143250"/>
           </a:xfrm>
           <a:prstGeom prst="rect">
             <a:avLst/>
@@ -4505,7 +5464,12 @@
             <p:ph type="title"/>
           </p:nvPr>
         </p:nvSpPr>
-        <p:spPr/>
+        <p:spPr>
+          <a:xfrm>
+            <a:off x="838200" y="365125"/>
+            <a:ext cx="10218235" cy="1344148"/>
+          </a:xfrm>
+        </p:spPr>
         <p:txBody>
           <a:bodyPr/>
           <a:lstStyle/>
@@ -4540,14 +5504,28 @@
           </a:xfrm>
         </p:spPr>
         <p:txBody>
-          <a:bodyPr>
-            <a:normAutofit fontScale="92500" lnSpcReduction="10000"/>
+          <a:bodyPr vert="horz" lIns="91440" tIns="45720" rIns="91440" bIns="45720" rtlCol="0" anchor="t">
+            <a:normAutofit fontScale="92500" lnSpcReduction="20000"/>
           </a:bodyPr>
           <a:lstStyle/>
           <a:p>
             <a:r>
+              <a:rPr lang="de-DE" b="1"/>
+              <a:t>Positiver Wert:</a:t>
+            </a:r>
+            <a:br>
               <a:rPr lang="de-DE" dirty="0"/>
-              <a:t>Positiver Wert = mehr Verkehr an Kreuzung X → mehr an Kreuzung 6.</a:t>
+            </a:br>
+            <a:r>
+              <a:rPr lang="de-DE"/>
+              <a:t>Verkehr an Kreuzung X</a:t>
+            </a:r>
+            <a:br>
+              <a:rPr lang="de-DE" dirty="0"/>
+            </a:br>
+            <a:r>
+              <a:rPr lang="de-DE"/>
+              <a:t>steigt, wenn Verkehr an Kreuzung 6 steigt.</a:t>
             </a:r>
           </a:p>
           <a:p>
@@ -4556,7 +5534,18 @@
           <a:p>
             <a:r>
               <a:rPr lang="de-DE" dirty="0"/>
-              <a:t> Negativer Wert = Weniger Verkehr an Kreuzung X, weniger an Kreuzung 6</a:t>
+              <a:t> </a:t>
+            </a:r>
+            <a:r>
+              <a:rPr lang="de-DE" b="1"/>
+              <a:t>Negativer Wert:</a:t>
+            </a:r>
+            <a:br>
+              <a:rPr lang="de-DE" dirty="0"/>
+            </a:br>
+            <a:r>
+              <a:rPr lang="de-DE"/>
+              <a:t>Verkehr an Kreuzung X fällt, wenn Verkehr an Kreuzung 6 steigt</a:t>
             </a:r>
           </a:p>
           <a:p>
@@ -4565,8 +5554,13 @@
           <a:p>
             <a:r>
               <a:rPr lang="de-DE" dirty="0"/>
-              <a:t>TODO: Welches Merkmal hat den höchsten Wert? → Hervorheben</a:t>
-            </a:r>
+              <a:t>Kreuzung 1 korreliert am stärksten mit Kreuzung 6 </a:t>
+            </a:r>
+            <a:r>
+              <a:rPr lang="de-DE"/>
+              <a:t>anhand der Merkmale</a:t>
+            </a:r>
+            <a:endParaRPr lang="de-DE" dirty="0"/>
           </a:p>
         </p:txBody>
       </p:sp>

--- a/DMG_B1.pptx
+++ b/DMG_B1.pptx
@@ -126,7 +126,7 @@
 <file path=ppt/revisionInfo.xml><?xml version="1.0" encoding="utf-8"?>
 <p1510:revInfo xmlns:a="http://schemas.openxmlformats.org/drawingml/2006/main" xmlns:r="http://schemas.openxmlformats.org/officeDocument/2006/relationships" xmlns:p1510="http://schemas.microsoft.com/office/powerpoint/2015/10/main">
   <p1510:revLst>
-    <p1510:client id="{6A327423-E4D8-4E16-A8FF-9036B760B5A8}" v="730" dt="2026-05-06T16:45:02.348"/>
+    <p1510:client id="{6A327423-E4D8-4E16-A8FF-9036B760B5A8}" v="976" dt="2026-05-06T18:12:28.875"/>
   </p1510:revLst>
 </p1510:revInfo>
 </file>
@@ -3635,8 +3635,8 @@
           </a:p>
           <a:p>
             <a:r>
-              <a:rPr lang="de-DE" sz="1600" dirty="0"/>
-              <a:t>Steven</a:t>
+              <a:rPr lang="de-DE" sz="1600"/>
+              <a:t>Steven Baumgart</a:t>
             </a:r>
           </a:p>
         </p:txBody>
@@ -4706,33 +4706,49 @@
         <p:spPr>
           <a:xfrm>
             <a:off x="838200" y="1825625"/>
-            <a:ext cx="4114800" cy="4351338"/>
+            <a:ext cx="4644481" cy="4351338"/>
           </a:xfrm>
         </p:spPr>
         <p:txBody>
-          <a:bodyPr/>
-          <a:lstStyle/>
-          <a:p>
+          <a:bodyPr vert="horz" lIns="91440" tIns="45720" rIns="91440" bIns="45720" rtlCol="0" anchor="t">
+            <a:normAutofit/>
+          </a:bodyPr>
+          <a:lstStyle/>
+          <a:p>
+            <a:pPr marL="0" indent="0">
+              <a:buNone/>
+            </a:pPr>
+            <a:r>
+              <a:rPr lang="de-DE"/>
+              <a:t>Was ist das Ziel?</a:t>
+            </a:r>
+          </a:p>
+          <a:p>
+            <a:pPr marL="457200" indent="-457200"/>
+            <a:r>
+              <a:rPr lang="de-DE"/>
+              <a:t>Verkehr an Kreuzung 6 vorhersagen</a:t>
+            </a:r>
+          </a:p>
+          <a:p>
+            <a:pPr marL="457200" indent="-457200"/>
             <a:r>
               <a:rPr lang="de-DE" dirty="0"/>
-              <a:t>Was ist das Ziel? </a:t>
-            </a:r>
-          </a:p>
-          <a:p>
-            <a:pPr lvl="1"/>
-            <a:r>
-              <a:rPr lang="de-DE" sz="1400" i="1" dirty="0"/>
-              <a:t>Verkehr an Kreuzung 6 vorhersagen</a:t>
+              <a:t>Ampelschaltungen anpassen (</a:t>
+            </a:r>
+            <a:r>
+              <a:rPr lang="de-DE"/>
+              <a:t>Phasenlängen, Häufigkeiten, etc.)</a:t>
             </a:r>
           </a:p>
         </p:txBody>
       </p:sp>
       <p:pic>
         <p:nvPicPr>
-          <p:cNvPr id="9" name="Grafik 8">
-            <a:extLst>
-              <a:ext uri="{FF2B5EF4-FFF2-40B4-BE49-F238E27FC236}">
-                <a16:creationId xmlns:a16="http://schemas.microsoft.com/office/drawing/2014/main" id="{47899138-E1BD-FA3C-7647-BA10B4654A6C}"/>
+          <p:cNvPr id="4" name="Grafik 3" descr="Ein Bild, das Text, Screenshot, Schrift, Zahl enthält.&#10;&#10;KI-generierte Inhalte können fehlerhaft sein.">
+            <a:extLst>
+              <a:ext uri="{FF2B5EF4-FFF2-40B4-BE49-F238E27FC236}">
+                <a16:creationId xmlns:a16="http://schemas.microsoft.com/office/drawing/2014/main" id="{2F87D816-47EA-8B1D-5EA5-2C06ADBC2BA0}"/>
               </a:ext>
             </a:extLst>
           </p:cNvPr>
@@ -4749,14 +4765,61 @@
         </p:blipFill>
         <p:spPr>
           <a:xfrm>
-            <a:off x="1877786" y="3140869"/>
-            <a:ext cx="7847076" cy="1720850"/>
+            <a:off x="5682242" y="1405518"/>
+            <a:ext cx="5789807" cy="4567354"/>
           </a:xfrm>
           <a:prstGeom prst="rect">
             <a:avLst/>
           </a:prstGeom>
         </p:spPr>
       </p:pic>
+      <p:sp>
+        <p:nvSpPr>
+          <p:cNvPr id="5" name="Textfeld 4">
+            <a:extLst>
+              <a:ext uri="{FF2B5EF4-FFF2-40B4-BE49-F238E27FC236}">
+                <a16:creationId xmlns:a16="http://schemas.microsoft.com/office/drawing/2014/main" id="{EF4A0C90-1DFC-BF5F-B0A4-43D95595775F}"/>
+              </a:ext>
+            </a:extLst>
+          </p:cNvPr>
+          <p:cNvSpPr txBox="1"/>
+          <p:nvPr/>
+        </p:nvSpPr>
+        <p:spPr>
+          <a:xfrm>
+            <a:off x="836857" y="5512367"/>
+            <a:ext cx="4406589" cy="1200329"/>
+          </a:xfrm>
+          <a:prstGeom prst="rect">
+            <a:avLst/>
+          </a:prstGeom>
+          <a:noFill/>
+        </p:spPr>
+        <p:txBody>
+          <a:bodyPr rot="0" spcFirstLastPara="0" vertOverflow="overflow" horzOverflow="overflow" vert="horz" wrap="square" lIns="91440" tIns="45720" rIns="91440" bIns="45720" numCol="1" spcCol="0" rtlCol="0" fromWordArt="0" anchor="t" anchorCtr="0" forceAA="0" compatLnSpc="1">
+            <a:prstTxWarp prst="textNoShape">
+              <a:avLst/>
+            </a:prstTxWarp>
+            <a:spAutoFit/>
+          </a:bodyPr>
+          <a:lstStyle/>
+          <a:p>
+            <a:r>
+              <a:rPr lang="de-DE"/>
+              <a:t>Messungen hier in 5-Minuten-Zeiträumen,</a:t>
+            </a:r>
+          </a:p>
+          <a:p>
+            <a:r>
+              <a:rPr lang="de-DE"/>
+              <a:t>16128 Messungen insgesamt (entspricht 56 Tagen)</a:t>
+            </a:r>
+          </a:p>
+          <a:p>
+            <a:endParaRPr lang="de-DE" dirty="0"/>
+          </a:p>
+        </p:txBody>
+      </p:sp>
     </p:spTree>
     <p:extLst>
       <p:ext uri="{BB962C8B-B14F-4D97-AF65-F5344CB8AC3E}">
@@ -4834,7 +4897,7 @@
         <p:spPr>
           <a:xfrm>
             <a:off x="838200" y="1825625"/>
-            <a:ext cx="4195527" cy="4351338"/>
+            <a:ext cx="4697331" cy="4351338"/>
           </a:xfrm>
         </p:spPr>
         <p:txBody>
@@ -4848,25 +4911,21 @@
             </a:pPr>
             <a:r>
               <a:rPr lang="de-DE" dirty="0"/>
-              <a:t>Große Unterschiede bei den Mittelwerten </a:t>
-            </a:r>
-            <a:r>
-              <a:rPr lang="de-DE"/>
-              <a:t>erkennbar, deutliche </a:t>
-            </a:r>
-            <a:r>
-              <a:rPr lang="de-DE" dirty="0"/>
-              <a:t>Unterschiede in der Verkehrslage.</a:t>
+              <a:t>Große Unterschiede bei den Mittelwerten erkennbar, deutliche Unterschiede in </a:t>
+            </a:r>
+            <a:r>
+              <a:rPr lang="de-DE"/>
+              <a:t>der Verkehrslage</a:t>
             </a:r>
           </a:p>
         </p:txBody>
       </p:sp>
       <p:pic>
         <p:nvPicPr>
-          <p:cNvPr id="7" name="Grafik 6">
-            <a:extLst>
-              <a:ext uri="{FF2B5EF4-FFF2-40B4-BE49-F238E27FC236}">
-                <a16:creationId xmlns:a16="http://schemas.microsoft.com/office/drawing/2014/main" id="{F09EACAA-182B-B534-4893-42A3C47EE222}"/>
+          <p:cNvPr id="4" name="Grafik 3" descr="Ein Bild, das Text, Screenshot, Diagramm, Schrift enthält.&#10;&#10;KI-generierte Inhalte können fehlerhaft sein.">
+            <a:extLst>
+              <a:ext uri="{FF2B5EF4-FFF2-40B4-BE49-F238E27FC236}">
+                <a16:creationId xmlns:a16="http://schemas.microsoft.com/office/drawing/2014/main" id="{76776FD0-A79A-88E7-D99E-EA119F4F562B}"/>
               </a:ext>
             </a:extLst>
           </p:cNvPr>
@@ -4883,8 +4942,8 @@
         </p:blipFill>
         <p:spPr>
           <a:xfrm>
-            <a:off x="190500" y="4001294"/>
-            <a:ext cx="5905500" cy="1323975"/>
+            <a:off x="6099369" y="1671521"/>
+            <a:ext cx="5438775" cy="4667250"/>
           </a:xfrm>
           <a:prstGeom prst="rect">
             <a:avLst/>
@@ -4893,10 +4952,10 @@
       </p:pic>
       <p:pic>
         <p:nvPicPr>
-          <p:cNvPr id="4" name="Grafik 3" descr="Ein Bild, das Text, Screenshot, Diagramm, Schrift enthält.&#10;&#10;KI-generierte Inhalte können fehlerhaft sein.">
-            <a:extLst>
-              <a:ext uri="{FF2B5EF4-FFF2-40B4-BE49-F238E27FC236}">
-                <a16:creationId xmlns:a16="http://schemas.microsoft.com/office/drawing/2014/main" id="{76776FD0-A79A-88E7-D99E-EA119F4F562B}"/>
+          <p:cNvPr id="5" name="Grafik 4" descr="Ein Bild, das Text, Screenshot, Schrift, Zahl enthält.&#10;&#10;KI-generierte Inhalte können fehlerhaft sein.">
+            <a:extLst>
+              <a:ext uri="{FF2B5EF4-FFF2-40B4-BE49-F238E27FC236}">
+                <a16:creationId xmlns:a16="http://schemas.microsoft.com/office/drawing/2014/main" id="{4DB86913-770B-0740-CF7D-B71868DE6B6B}"/>
               </a:ext>
             </a:extLst>
           </p:cNvPr>
@@ -4913,8 +4972,8 @@
         </p:blipFill>
         <p:spPr>
           <a:xfrm>
-            <a:off x="6099369" y="1522838"/>
-            <a:ext cx="5438775" cy="4667250"/>
+            <a:off x="247069" y="4008630"/>
+            <a:ext cx="5862057" cy="2511348"/>
           </a:xfrm>
           <a:prstGeom prst="rect">
             <a:avLst/>
